--- a/stage4/Final-Presentation-El-Kapitan.pptx
+++ b/stage4/Final-Presentation-El-Kapitan.pptx
@@ -66,30 +66,6 @@
     </pc:docChg>
   </pc:docChgLst>
   <pc:docChgLst>
-    <pc:chgData name="Bhuvanesh Annauth" userId="S::ba21eq@brocku.ca::445411a4-3893-40cb-b803-b359afa58af6" providerId="AD" clId="Web-{785C922B-7429-2D8D-FF7B-4FB7131C421B}"/>
-    <pc:docChg chg="modSld">
-      <pc:chgData name="Bhuvanesh Annauth" userId="S::ba21eq@brocku.ca::445411a4-3893-40cb-b803-b359afa58af6" providerId="AD" clId="Web-{785C922B-7429-2D8D-FF7B-4FB7131C421B}" dt="2026-04-22T16:23:01.161" v="8" actId="20577"/>
-      <pc:docMkLst>
-        <pc:docMk/>
-      </pc:docMkLst>
-      <pc:sldChg chg="modSp">
-        <pc:chgData name="Bhuvanesh Annauth" userId="S::ba21eq@brocku.ca::445411a4-3893-40cb-b803-b359afa58af6" providerId="AD" clId="Web-{785C922B-7429-2D8D-FF7B-4FB7131C421B}" dt="2026-04-22T16:23:01.161" v="8" actId="20577"/>
-        <pc:sldMkLst>
-          <pc:docMk/>
-          <pc:sldMk cId="0" sldId="266"/>
-        </pc:sldMkLst>
-        <pc:spChg chg="mod">
-          <ac:chgData name="Bhuvanesh Annauth" userId="S::ba21eq@brocku.ca::445411a4-3893-40cb-b803-b359afa58af6" providerId="AD" clId="Web-{785C922B-7429-2D8D-FF7B-4FB7131C421B}" dt="2026-04-22T16:23:01.161" v="8" actId="20577"/>
-          <ac:spMkLst>
-            <pc:docMk/>
-            <pc:sldMk cId="0" sldId="266"/>
-            <ac:spMk id="20" creationId="{00000000-0000-0000-0000-000000000000}"/>
-          </ac:spMkLst>
-        </pc:spChg>
-      </pc:sldChg>
-    </pc:docChg>
-  </pc:docChgLst>
-  <pc:docChgLst>
     <pc:chgData name="Mehrbod Mehrabi" userId="S::mm21nz@brocku.ca::6984a107-0553-4adb-8414-3ca6f17fb6e3" providerId="AD" clId="Web-{4983D648-112A-AFCD-FD8F-2AB4E9672A68}"/>
     <pc:docChg chg="addSld modSld">
       <pc:chgData name="Mehrbod Mehrabi" userId="S::mm21nz@brocku.ca::6984a107-0553-4adb-8414-3ca6f17fb6e3" providerId="AD" clId="Web-{4983D648-112A-AFCD-FD8F-2AB4E9672A68}" dt="2026-04-22T02:53:48.288" v="211"/>
@@ -125,6 +101,30 @@
           <pc:docMk/>
           <pc:sldMk cId="1952687183" sldId="268"/>
         </pc:sldMkLst>
+      </pc:sldChg>
+    </pc:docChg>
+  </pc:docChgLst>
+  <pc:docChgLst>
+    <pc:chgData name="Bhuvanesh Annauth" userId="S::ba21eq@brocku.ca::445411a4-3893-40cb-b803-b359afa58af6" providerId="AD" clId="Web-{785C922B-7429-2D8D-FF7B-4FB7131C421B}"/>
+    <pc:docChg chg="modSld">
+      <pc:chgData name="Bhuvanesh Annauth" userId="S::ba21eq@brocku.ca::445411a4-3893-40cb-b803-b359afa58af6" providerId="AD" clId="Web-{785C922B-7429-2D8D-FF7B-4FB7131C421B}" dt="2026-04-22T16:23:01.161" v="8" actId="20577"/>
+      <pc:docMkLst>
+        <pc:docMk/>
+      </pc:docMkLst>
+      <pc:sldChg chg="modSp">
+        <pc:chgData name="Bhuvanesh Annauth" userId="S::ba21eq@brocku.ca::445411a4-3893-40cb-b803-b359afa58af6" providerId="AD" clId="Web-{785C922B-7429-2D8D-FF7B-4FB7131C421B}" dt="2026-04-22T16:23:01.161" v="8" actId="20577"/>
+        <pc:sldMkLst>
+          <pc:docMk/>
+          <pc:sldMk cId="0" sldId="266"/>
+        </pc:sldMkLst>
+        <pc:spChg chg="mod">
+          <ac:chgData name="Bhuvanesh Annauth" userId="S::ba21eq@brocku.ca::445411a4-3893-40cb-b803-b359afa58af6" providerId="AD" clId="Web-{785C922B-7429-2D8D-FF7B-4FB7131C421B}" dt="2026-04-22T16:23:01.161" v="8" actId="20577"/>
+          <ac:spMkLst>
+            <pc:docMk/>
+            <pc:sldMk cId="0" sldId="266"/>
+            <ac:spMk id="20" creationId="{00000000-0000-0000-0000-000000000000}"/>
+          </ac:spMkLst>
+        </pc:spChg>
       </pc:sldChg>
     </pc:docChg>
   </pc:docChgLst>
@@ -732,6 +732,13 @@
             <a:noFill/>
           </a:ln>
         </p:spPr>
+        <p:txBody>
+          <a:bodyPr/>
+          <a:lstStyle/>
+          <a:p>
+            <a:endParaRPr lang="en-US"/>
+          </a:p>
+        </p:txBody>
       </p:sp>
       <p:sp>
         <p:nvSpPr>
@@ -756,6 +763,13 @@
             </a:solidFill>
           </a:ln>
         </p:spPr>
+        <p:txBody>
+          <a:bodyPr/>
+          <a:lstStyle/>
+          <a:p>
+            <a:endParaRPr lang="en-US"/>
+          </a:p>
+        </p:txBody>
       </p:sp>
       <p:sp>
         <p:nvSpPr>
@@ -1034,6 +1048,13 @@
             <a:noFill/>
           </a:ln>
         </p:spPr>
+        <p:txBody>
+          <a:bodyPr/>
+          <a:lstStyle/>
+          <a:p>
+            <a:endParaRPr lang="en-US"/>
+          </a:p>
+        </p:txBody>
       </p:sp>
       <p:sp>
         <p:nvSpPr>
@@ -1392,6 +1413,13 @@
             <a:noFill/>
           </a:ln>
         </p:spPr>
+        <p:txBody>
+          <a:bodyPr/>
+          <a:lstStyle/>
+          <a:p>
+            <a:endParaRPr lang="en-US"/>
+          </a:p>
+        </p:txBody>
       </p:sp>
       <p:sp>
         <p:nvSpPr>
@@ -1679,6 +1707,13 @@
             <a:noFill/>
           </a:ln>
         </p:spPr>
+        <p:txBody>
+          <a:bodyPr/>
+          <a:lstStyle/>
+          <a:p>
+            <a:endParaRPr lang="en-US"/>
+          </a:p>
+        </p:txBody>
       </p:sp>
       <p:sp>
         <p:nvSpPr>
@@ -1708,7 +1743,7 @@
               <a:buChar char="•"/>
             </a:pPr>
             <a:r>
-              <a:rPr lang="en-US" sz="2400">
+              <a:rPr lang="en-US" sz="2400" dirty="0">
                 <a:solidFill>
                   <a:srgbClr val="24313D"/>
                 </a:solidFill>
@@ -1724,7 +1759,7 @@
               <a:buChar char="•"/>
             </a:pPr>
             <a:r>
-              <a:rPr lang="en-US" sz="2400">
+              <a:rPr lang="en-US" sz="2400" dirty="0">
                 <a:solidFill>
                   <a:srgbClr val="24313D"/>
                 </a:solidFill>
@@ -1756,7 +1791,7 @@
               <a:buChar char="•"/>
             </a:pPr>
             <a:r>
-              <a:rPr lang="en-US" sz="2400">
+              <a:rPr lang="en-US" sz="2400" dirty="0">
                 <a:solidFill>
                   <a:srgbClr val="24313D"/>
                 </a:solidFill>
@@ -1772,7 +1807,7 @@
               <a:buChar char="•"/>
             </a:pPr>
             <a:r>
-              <a:rPr lang="en-US" sz="2400">
+              <a:rPr lang="en-US" sz="2400" dirty="0">
                 <a:solidFill>
                   <a:srgbClr val="24313D"/>
                 </a:solidFill>
@@ -1781,80 +1816,6 @@
               </a:rPr>
               <a:t>Supports Java, C, and C++ submissions</a:t>
             </a:r>
-          </a:p>
-          <a:p>
-            <a:pPr marL="285750" indent="-171450" algn="l">
-              <a:buFont typeface="Arial"/>
-              <a:buChar char="•"/>
-            </a:pPr>
-            <a:endParaRPr lang="en-US" sz="2400" dirty="0">
-              <a:solidFill>
-                <a:srgbClr val="24313D"/>
-              </a:solidFill>
-              <a:latin typeface="Aptos"/>
-              <a:cs typeface="Aptos"/>
-            </a:endParaRPr>
-          </a:p>
-          <a:p>
-            <a:pPr marL="285750" indent="-171450" algn="l">
-              <a:buFont typeface="Arial,Sans-Serif"/>
-              <a:buChar char="•"/>
-            </a:pPr>
-            <a:r>
-              <a:rPr lang="en-US" sz="2400">
-                <a:solidFill>
-                  <a:srgbClr val="24313D"/>
-                </a:solidFill>
-                <a:latin typeface="Aptos"/>
-              </a:rPr>
-              <a:t>Manual plagiarism checking is slow and inconsistent</a:t>
-            </a:r>
-          </a:p>
-          <a:p>
-            <a:pPr marL="285750" indent="-171450" algn="l">
-              <a:buFont typeface="Arial,Sans-Serif"/>
-              <a:buChar char="•"/>
-            </a:pPr>
-            <a:r>
-              <a:rPr lang="en-US" sz="2400">
-                <a:solidFill>
-                  <a:srgbClr val="24313D"/>
-                </a:solidFill>
-                <a:latin typeface="Aptos"/>
-              </a:rPr>
-              <a:t>Raw text comparison is not reliable enough for source code</a:t>
-            </a:r>
-          </a:p>
-          <a:p>
-            <a:pPr marL="285750" indent="-171450" algn="l">
-              <a:buFont typeface="Arial,Sans-Serif"/>
-              <a:buChar char="•"/>
-            </a:pPr>
-            <a:r>
-              <a:rPr lang="en-US" sz="2400">
-                <a:solidFill>
-                  <a:srgbClr val="24313D"/>
-                </a:solidFill>
-                <a:latin typeface="Aptos"/>
-              </a:rPr>
-              <a:t>Instructors need organized results by course and assignment</a:t>
-            </a:r>
-          </a:p>
-          <a:p>
-            <a:pPr marL="285750" indent="-171450" algn="l">
-              <a:buFont typeface="Arial,Sans-Serif"/>
-              <a:buChar char="•"/>
-            </a:pPr>
-            <a:r>
-              <a:rPr lang="en-US" sz="2400">
-                <a:solidFill>
-                  <a:srgbClr val="24313D"/>
-                </a:solidFill>
-                <a:latin typeface="Aptos"/>
-              </a:rPr>
-              <a:t>Useful results should include similarity scores and matching regions</a:t>
-            </a:r>
-            <a:endParaRPr lang="en-US"/>
           </a:p>
         </p:txBody>
       </p:sp>
@@ -1949,6 +1910,13 @@
             <a:noFill/>
           </a:ln>
         </p:spPr>
+        <p:txBody>
+          <a:bodyPr/>
+          <a:lstStyle/>
+          <a:p>
+            <a:endParaRPr lang="en-US"/>
+          </a:p>
+        </p:txBody>
       </p:sp>
       <p:sp>
         <p:nvSpPr>
@@ -2217,6 +2185,13 @@
             <a:noFill/>
           </a:ln>
         </p:spPr>
+        <p:txBody>
+          <a:bodyPr/>
+          <a:lstStyle/>
+          <a:p>
+            <a:endParaRPr lang="en-US"/>
+          </a:p>
+        </p:txBody>
       </p:sp>
       <p:sp>
         <p:nvSpPr>
@@ -2658,6 +2633,13 @@
             <a:noFill/>
           </a:ln>
         </p:spPr>
+        <p:txBody>
+          <a:bodyPr/>
+          <a:lstStyle/>
+          <a:p>
+            <a:endParaRPr lang="en-US"/>
+          </a:p>
+        </p:txBody>
       </p:sp>
       <p:sp>
         <p:nvSpPr>
@@ -2943,6 +2925,13 @@
             <a:noFill/>
           </a:ln>
         </p:spPr>
+        <p:txBody>
+          <a:bodyPr/>
+          <a:lstStyle/>
+          <a:p>
+            <a:endParaRPr lang="en-US"/>
+          </a:p>
+        </p:txBody>
       </p:sp>
       <p:sp>
         <p:nvSpPr>
@@ -3299,6 +3288,13 @@
             <a:noFill/>
           </a:ln>
         </p:spPr>
+        <p:txBody>
+          <a:bodyPr/>
+          <a:lstStyle/>
+          <a:p>
+            <a:endParaRPr lang="en-US"/>
+          </a:p>
+        </p:txBody>
       </p:sp>
       <p:sp>
         <p:nvSpPr>
@@ -3634,6 +3630,13 @@
             <a:noFill/>
           </a:ln>
         </p:spPr>
+        <p:txBody>
+          <a:bodyPr/>
+          <a:lstStyle/>
+          <a:p>
+            <a:endParaRPr lang="en-US"/>
+          </a:p>
+        </p:txBody>
       </p:sp>
       <p:sp>
         <p:nvSpPr>
@@ -4260,6 +4263,13 @@
             <a:noFill/>
           </a:ln>
         </p:spPr>
+        <p:txBody>
+          <a:bodyPr/>
+          <a:lstStyle/>
+          <a:p>
+            <a:endParaRPr lang="en-US"/>
+          </a:p>
+        </p:txBody>
       </p:sp>
       <p:sp>
         <p:nvSpPr>
